--- a/presentazione/Presentation_project_data_visualization.pptx
+++ b/presentazione/Presentation_project_data_visualization.pptx
@@ -130,6 +130,138 @@
 </p:presentation>
 </file>
 
+<file path=ppt/revisionInfo.xml><?xml version="1.0" encoding="utf-8"?>
+<p1510:revInfo xmlns:a="http://schemas.openxmlformats.org/drawingml/2006/main" xmlns:r="http://schemas.openxmlformats.org/officeDocument/2006/relationships" xmlns:p1510="http://schemas.microsoft.com/office/powerpoint/2015/10/main">
+  <p1510:revLst>
+    <p1510:client id="{107EF201-5AA2-FE59-7E78-84524CE4586A}" v="4" dt="2026-03-26T09:24:11.547"/>
+    <p1510:client id="{1D3B6199-EC4D-A620-AEFB-14783EC761E9}" v="17" dt="2026-03-26T11:21:37.812"/>
+    <p1510:client id="{596D4807-1A02-539F-0065-0A2277EE4669}" v="9" dt="2026-03-26T10:06:59.563"/>
+    <p1510:client id="{968DBBAE-7339-CE3B-CEF9-F49B1A21A755}" v="2" dt="2026-03-26T10:58:33.161"/>
+  </p1510:revLst>
+</p1510:revInfo>
+</file>
+
+<file path=ppt/changesInfos/changesInfo1.xml><?xml version="1.0" encoding="utf-8"?>
+<pc:chgInfo xmlns:a="http://schemas.openxmlformats.org/drawingml/2006/main" xmlns:r="http://schemas.openxmlformats.org/officeDocument/2006/relationships" xmlns:ac="http://schemas.microsoft.com/office/drawing/2013/main/command" xmlns:pc="http://schemas.microsoft.com/office/powerpoint/2013/main/command">
+  <pc:docChgLst>
+    <pc:chgData name="Matteo Vitobello" userId="S::matteo.vitobello@studenti.unimi.it::54bfa91e-61f9-4d6f-9509-7ad9f4bf2bf6" providerId="AD" clId="Web-{1D3B6199-EC4D-A620-AEFB-14783EC761E9}"/>
+    <pc:docChg chg="modSld">
+      <pc:chgData name="Matteo Vitobello" userId="S::matteo.vitobello@studenti.unimi.it::54bfa91e-61f9-4d6f-9509-7ad9f4bf2bf6" providerId="AD" clId="Web-{1D3B6199-EC4D-A620-AEFB-14783EC761E9}" dt="2026-03-26T11:21:37.812" v="16"/>
+      <pc:docMkLst>
+        <pc:docMk/>
+      </pc:docMkLst>
+      <pc:sldChg chg="modSp">
+        <pc:chgData name="Matteo Vitobello" userId="S::matteo.vitobello@studenti.unimi.it::54bfa91e-61f9-4d6f-9509-7ad9f4bf2bf6" providerId="AD" clId="Web-{1D3B6199-EC4D-A620-AEFB-14783EC761E9}" dt="2026-03-26T11:20:48.762" v="8"/>
+        <pc:sldMkLst>
+          <pc:docMk/>
+          <pc:sldMk cId="542402924" sldId="259"/>
+        </pc:sldMkLst>
+        <pc:spChg chg="mod">
+          <ac:chgData name="Matteo Vitobello" userId="S::matteo.vitobello@studenti.unimi.it::54bfa91e-61f9-4d6f-9509-7ad9f4bf2bf6" providerId="AD" clId="Web-{1D3B6199-EC4D-A620-AEFB-14783EC761E9}" dt="2026-03-26T11:20:48.762" v="8"/>
+          <ac:spMkLst>
+            <pc:docMk/>
+            <pc:sldMk cId="542402924" sldId="259"/>
+            <ac:spMk id="2" creationId="{94D8AE82-9A5D-61B9-BF56-3FFBFCCCB648}"/>
+          </ac:spMkLst>
+        </pc:spChg>
+      </pc:sldChg>
+      <pc:sldChg chg="addSp delSp modSp">
+        <pc:chgData name="Matteo Vitobello" userId="S::matteo.vitobello@studenti.unimi.it::54bfa91e-61f9-4d6f-9509-7ad9f4bf2bf6" providerId="AD" clId="Web-{1D3B6199-EC4D-A620-AEFB-14783EC761E9}" dt="2026-03-26T11:21:29.999" v="14" actId="1076"/>
+        <pc:sldMkLst>
+          <pc:docMk/>
+          <pc:sldMk cId="2571486997" sldId="260"/>
+        </pc:sldMkLst>
+        <pc:spChg chg="mod">
+          <ac:chgData name="Matteo Vitobello" userId="S::matteo.vitobello@studenti.unimi.it::54bfa91e-61f9-4d6f-9509-7ad9f4bf2bf6" providerId="AD" clId="Web-{1D3B6199-EC4D-A620-AEFB-14783EC761E9}" dt="2026-03-26T11:21:00.247" v="12" actId="1076"/>
+          <ac:spMkLst>
+            <pc:docMk/>
+            <pc:sldMk cId="2571486997" sldId="260"/>
+            <ac:spMk id="2" creationId="{8D798A53-38A1-2812-DF7A-11BC2D2EEF3B}"/>
+          </ac:spMkLst>
+        </pc:spChg>
+        <pc:spChg chg="del">
+          <ac:chgData name="Matteo Vitobello" userId="S::matteo.vitobello@studenti.unimi.it::54bfa91e-61f9-4d6f-9509-7ad9f4bf2bf6" providerId="AD" clId="Web-{1D3B6199-EC4D-A620-AEFB-14783EC761E9}" dt="2026-03-26T11:19:25.866" v="0"/>
+          <ac:spMkLst>
+            <pc:docMk/>
+            <pc:sldMk cId="2571486997" sldId="260"/>
+            <ac:spMk id="5" creationId="{A24E2F76-1DAA-BF42-09FE-BA901186EF17}"/>
+          </ac:spMkLst>
+        </pc:spChg>
+        <pc:spChg chg="add del mod">
+          <ac:chgData name="Matteo Vitobello" userId="S::matteo.vitobello@studenti.unimi.it::54bfa91e-61f9-4d6f-9509-7ad9f4bf2bf6" providerId="AD" clId="Web-{1D3B6199-EC4D-A620-AEFB-14783EC761E9}" dt="2026-03-26T11:19:43.742" v="2"/>
+          <ac:spMkLst>
+            <pc:docMk/>
+            <pc:sldMk cId="2571486997" sldId="260"/>
+            <ac:spMk id="6" creationId="{3FC53020-9FFE-A437-64B0-FA1093BABF4B}"/>
+          </ac:spMkLst>
+        </pc:spChg>
+        <pc:picChg chg="del">
+          <ac:chgData name="Matteo Vitobello" userId="S::matteo.vitobello@studenti.unimi.it::54bfa91e-61f9-4d6f-9509-7ad9f4bf2bf6" providerId="AD" clId="Web-{1D3B6199-EC4D-A620-AEFB-14783EC761E9}" dt="2026-03-26T11:19:27.788" v="1"/>
+          <ac:picMkLst>
+            <pc:docMk/>
+            <pc:sldMk cId="2571486997" sldId="260"/>
+            <ac:picMk id="4" creationId="{FECD61F1-816D-0B15-E6BE-682897152FA7}"/>
+          </ac:picMkLst>
+        </pc:picChg>
+        <pc:picChg chg="add mod ord">
+          <ac:chgData name="Matteo Vitobello" userId="S::matteo.vitobello@studenti.unimi.it::54bfa91e-61f9-4d6f-9509-7ad9f4bf2bf6" providerId="AD" clId="Web-{1D3B6199-EC4D-A620-AEFB-14783EC761E9}" dt="2026-03-26T11:21:29.999" v="14" actId="1076"/>
+          <ac:picMkLst>
+            <pc:docMk/>
+            <pc:sldMk cId="2571486997" sldId="260"/>
+            <ac:picMk id="7" creationId="{FCB509A1-EB75-8CF6-9A3A-0A925C0A7760}"/>
+          </ac:picMkLst>
+        </pc:picChg>
+      </pc:sldChg>
+      <pc:sldChg chg="modSp">
+        <pc:chgData name="Matteo Vitobello" userId="S::matteo.vitobello@studenti.unimi.it::54bfa91e-61f9-4d6f-9509-7ad9f4bf2bf6" providerId="AD" clId="Web-{1D3B6199-EC4D-A620-AEFB-14783EC761E9}" dt="2026-03-26T11:21:37.812" v="16"/>
+        <pc:sldMkLst>
+          <pc:docMk/>
+          <pc:sldMk cId="3349808168" sldId="271"/>
+        </pc:sldMkLst>
+        <pc:spChg chg="mod">
+          <ac:chgData name="Matteo Vitobello" userId="S::matteo.vitobello@studenti.unimi.it::54bfa91e-61f9-4d6f-9509-7ad9f4bf2bf6" providerId="AD" clId="Web-{1D3B6199-EC4D-A620-AEFB-14783EC761E9}" dt="2026-03-26T11:21:37.812" v="16"/>
+          <ac:spMkLst>
+            <pc:docMk/>
+            <pc:sldMk cId="3349808168" sldId="271"/>
+            <ac:spMk id="2" creationId="{AC738B0E-5F52-319F-599E-45DEDDE5A129}"/>
+          </ac:spMkLst>
+        </pc:spChg>
+      </pc:sldChg>
+      <pc:sldChg chg="modSp">
+        <pc:chgData name="Matteo Vitobello" userId="S::matteo.vitobello@studenti.unimi.it::54bfa91e-61f9-4d6f-9509-7ad9f4bf2bf6" providerId="AD" clId="Web-{1D3B6199-EC4D-A620-AEFB-14783EC761E9}" dt="2026-03-26T11:20:28.714" v="5"/>
+        <pc:sldMkLst>
+          <pc:docMk/>
+          <pc:sldMk cId="2166965850" sldId="274"/>
+        </pc:sldMkLst>
+        <pc:spChg chg="mod">
+          <ac:chgData name="Matteo Vitobello" userId="S::matteo.vitobello@studenti.unimi.it::54bfa91e-61f9-4d6f-9509-7ad9f4bf2bf6" providerId="AD" clId="Web-{1D3B6199-EC4D-A620-AEFB-14783EC761E9}" dt="2026-03-26T11:20:28.714" v="5"/>
+          <ac:spMkLst>
+            <pc:docMk/>
+            <pc:sldMk cId="2166965850" sldId="274"/>
+            <ac:spMk id="10" creationId="{1A95B62C-B295-6416-20E7-F57CA95994F4}"/>
+          </ac:spMkLst>
+        </pc:spChg>
+      </pc:sldChg>
+      <pc:sldChg chg="modSp">
+        <pc:chgData name="Matteo Vitobello" userId="S::matteo.vitobello@studenti.unimi.it::54bfa91e-61f9-4d6f-9509-7ad9f4bf2bf6" providerId="AD" clId="Web-{1D3B6199-EC4D-A620-AEFB-14783EC761E9}" dt="2026-03-26T11:20:37.777" v="7"/>
+        <pc:sldMkLst>
+          <pc:docMk/>
+          <pc:sldMk cId="2818150743" sldId="275"/>
+        </pc:sldMkLst>
+        <pc:spChg chg="mod">
+          <ac:chgData name="Matteo Vitobello" userId="S::matteo.vitobello@studenti.unimi.it::54bfa91e-61f9-4d6f-9509-7ad9f4bf2bf6" providerId="AD" clId="Web-{1D3B6199-EC4D-A620-AEFB-14783EC761E9}" dt="2026-03-26T11:20:37.777" v="7"/>
+          <ac:spMkLst>
+            <pc:docMk/>
+            <pc:sldMk cId="2818150743" sldId="275"/>
+            <ac:spMk id="15" creationId="{38E65400-2887-A2F8-29EF-B598ED083C4A}"/>
+          </ac:spMkLst>
+        </pc:spChg>
+      </pc:sldChg>
+    </pc:docChg>
+  </pc:docChgLst>
+</pc:chgInfo>
+</file>
+
 <file path=ppt/notesMasters/notesMaster1.xml><?xml version="1.0" encoding="utf-8"?>
 <p:notesMaster xmlns:a="http://schemas.openxmlformats.org/drawingml/2006/main" xmlns:r="http://schemas.openxmlformats.org/officeDocument/2006/relationships" xmlns:p="http://schemas.openxmlformats.org/presentationml/2006/main">
   <p:cSld>
@@ -212,7 +344,7 @@
           <a:p>
             <a:fld id="{845A6C7D-7E10-417D-B0D8-D1612AD4A1A9}" type="datetimeFigureOut">
               <a:rPr lang="it-IT" smtClean="0"/>
-              <a:t>24/03/2026</a:t>
+              <a:t>26/03/2026</a:t>
             </a:fld>
             <a:endParaRPr lang="it-IT"/>
           </a:p>
@@ -370,7 +502,7 @@
           <a:p>
             <a:fld id="{EDB67ACC-33C8-47EF-BC52-CF7355F9BE46}" type="slidenum">
               <a:rPr lang="it-IT" smtClean="0"/>
-              <a:t>‹N›</a:t>
+              <a:t>‹#›</a:t>
             </a:fld>
             <a:endParaRPr lang="it-IT"/>
           </a:p>
@@ -639,7 +771,7 @@
           <a:p>
             <a:fld id="{D3781F62-F574-45B7-A0A1-084BEE16701F}" type="datetime1">
               <a:rPr lang="it-IT" smtClean="0"/>
-              <a:t>24/03/2026</a:t>
+              <a:t>26/03/2026</a:t>
             </a:fld>
             <a:endParaRPr lang="en-US"/>
           </a:p>
@@ -697,7 +829,7 @@
           <a:p>
             <a:fld id="{8DFDE724-0293-4953-AE9D-4D814FA589B0}" type="slidenum">
               <a:rPr lang="en-US" dirty="0"/>
-              <a:t>‹N›</a:t>
+              <a:t>‹#›</a:t>
             </a:fld>
             <a:endParaRPr lang="en-US"/>
           </a:p>
@@ -1004,7 +1136,7 @@
           <a:p>
             <a:fld id="{A2D83D41-2F15-48EB-AAD0-EBC7D753FE1A}" type="datetime1">
               <a:rPr lang="it-IT" smtClean="0"/>
-              <a:t>24/03/2026</a:t>
+              <a:t>26/03/2026</a:t>
             </a:fld>
             <a:endParaRPr lang="en-US"/>
           </a:p>
@@ -1062,7 +1194,7 @@
           <a:p>
             <a:fld id="{8DFDE724-0293-4953-AE9D-4D814FA589B0}" type="slidenum">
               <a:rPr lang="en-US" dirty="0"/>
-              <a:t>‹N›</a:t>
+              <a:t>‹#›</a:t>
             </a:fld>
             <a:endParaRPr lang="en-US"/>
           </a:p>
@@ -1360,7 +1492,7 @@
           <a:p>
             <a:fld id="{7BE62A28-A7B7-41B3-A7E1-F4A2B13AB6CB}" type="datetime1">
               <a:rPr lang="it-IT" smtClean="0"/>
-              <a:t>24/03/2026</a:t>
+              <a:t>26/03/2026</a:t>
             </a:fld>
             <a:endParaRPr lang="en-US"/>
           </a:p>
@@ -1418,7 +1550,7 @@
           <a:p>
             <a:fld id="{8DFDE724-0293-4953-AE9D-4D814FA589B0}" type="slidenum">
               <a:rPr lang="en-US" dirty="0"/>
-              <a:t>‹N›</a:t>
+              <a:t>‹#›</a:t>
             </a:fld>
             <a:endParaRPr lang="en-US"/>
           </a:p>
@@ -1737,7 +1869,7 @@
           <a:p>
             <a:fld id="{3FA3AF93-A4F0-440B-85BC-129713F076D5}" type="datetime1">
               <a:rPr lang="it-IT" smtClean="0"/>
-              <a:t>24/03/2026</a:t>
+              <a:t>26/03/2026</a:t>
             </a:fld>
             <a:endParaRPr lang="en-US"/>
           </a:p>
@@ -1795,7 +1927,7 @@
           <a:p>
             <a:fld id="{8DFDE724-0293-4953-AE9D-4D814FA589B0}" type="slidenum">
               <a:rPr lang="en-US" dirty="0"/>
-              <a:t>‹N›</a:t>
+              <a:t>‹#›</a:t>
             </a:fld>
             <a:endParaRPr lang="en-US"/>
           </a:p>
@@ -2074,7 +2206,7 @@
           <a:p>
             <a:fld id="{2ECAB6BF-9012-48D0-8A53-C9ECA0C32D37}" type="datetime1">
               <a:rPr lang="it-IT" smtClean="0"/>
-              <a:t>24/03/2026</a:t>
+              <a:t>26/03/2026</a:t>
             </a:fld>
             <a:endParaRPr lang="en-US"/>
           </a:p>
@@ -2132,7 +2264,7 @@
           <a:p>
             <a:fld id="{8DFDE724-0293-4953-AE9D-4D814FA589B0}" type="slidenum">
               <a:rPr lang="en-US" dirty="0"/>
-              <a:t>‹N›</a:t>
+              <a:t>‹#›</a:t>
             </a:fld>
             <a:endParaRPr lang="en-US"/>
           </a:p>
@@ -2401,7 +2533,7 @@
           <a:p>
             <a:fld id="{CB5040F6-6349-40E0-A7D7-17C1C3F33D5D}" type="datetime1">
               <a:rPr lang="it-IT" smtClean="0"/>
-              <a:t>24/03/2026</a:t>
+              <a:t>26/03/2026</a:t>
             </a:fld>
             <a:endParaRPr lang="en-US"/>
           </a:p>
@@ -2459,7 +2591,7 @@
           <a:p>
             <a:fld id="{8DFDE724-0293-4953-AE9D-4D814FA589B0}" type="slidenum">
               <a:rPr lang="en-US" dirty="0"/>
-              <a:t>‹N›</a:t>
+              <a:t>‹#›</a:t>
             </a:fld>
             <a:endParaRPr lang="en-US"/>
           </a:p>
@@ -2885,7 +3017,7 @@
           <a:p>
             <a:fld id="{D5008C88-2A7D-4A7C-A618-BEC3A4E446F2}" type="datetime1">
               <a:rPr lang="it-IT" smtClean="0"/>
-              <a:t>24/03/2026</a:t>
+              <a:t>26/03/2026</a:t>
             </a:fld>
             <a:endParaRPr lang="en-US"/>
           </a:p>
@@ -2943,7 +3075,7 @@
           <a:p>
             <a:fld id="{8DFDE724-0293-4953-AE9D-4D814FA589B0}" type="slidenum">
               <a:rPr lang="en-US" dirty="0"/>
-              <a:t>‹N›</a:t>
+              <a:t>‹#›</a:t>
             </a:fld>
             <a:endParaRPr lang="en-US"/>
           </a:p>
@@ -3050,7 +3182,7 @@
           <a:p>
             <a:fld id="{A88A87C2-EBB8-45ED-9AF7-0985F38621F7}" type="datetime1">
               <a:rPr lang="it-IT" smtClean="0"/>
-              <a:t>24/03/2026</a:t>
+              <a:t>26/03/2026</a:t>
             </a:fld>
             <a:endParaRPr lang="en-US"/>
           </a:p>
@@ -3108,7 +3240,7 @@
           <a:p>
             <a:fld id="{8DFDE724-0293-4953-AE9D-4D814FA589B0}" type="slidenum">
               <a:rPr lang="en-US" dirty="0"/>
-              <a:t>‹N›</a:t>
+              <a:t>‹#›</a:t>
             </a:fld>
             <a:endParaRPr lang="en-US"/>
           </a:p>
@@ -3167,7 +3299,7 @@
           <a:p>
             <a:fld id="{3BFEB595-3B79-4C00-A9CE-A41C1FE53ED5}" type="datetime1">
               <a:rPr lang="it-IT" smtClean="0"/>
-              <a:t>24/03/2026</a:t>
+              <a:t>26/03/2026</a:t>
             </a:fld>
             <a:endParaRPr lang="en-US"/>
           </a:p>
@@ -3225,7 +3357,7 @@
           <a:p>
             <a:fld id="{8DFDE724-0293-4953-AE9D-4D814FA589B0}" type="slidenum">
               <a:rPr lang="en-US" dirty="0"/>
-              <a:t>‹N›</a:t>
+              <a:t>‹#›</a:t>
             </a:fld>
             <a:endParaRPr lang="en-US"/>
           </a:p>
@@ -3492,7 +3624,7 @@
           <a:p>
             <a:fld id="{65A17DBD-110F-4FD4-B74E-515AABA55652}" type="datetime1">
               <a:rPr lang="it-IT" smtClean="0"/>
-              <a:t>24/03/2026</a:t>
+              <a:t>26/03/2026</a:t>
             </a:fld>
             <a:endParaRPr lang="en-US"/>
           </a:p>
@@ -3550,7 +3682,7 @@
           <a:p>
             <a:fld id="{8DFDE724-0293-4953-AE9D-4D814FA589B0}" type="slidenum">
               <a:rPr lang="en-US" dirty="0"/>
-              <a:t>‹N›</a:t>
+              <a:t>‹#›</a:t>
             </a:fld>
             <a:endParaRPr lang="en-US"/>
           </a:p>
@@ -3794,7 +3926,7 @@
           <a:p>
             <a:fld id="{56BDA6D8-6985-4210-94D2-A3E0E9CC5587}" type="datetime1">
               <a:rPr lang="it-IT" smtClean="0"/>
-              <a:t>24/03/2026</a:t>
+              <a:t>26/03/2026</a:t>
             </a:fld>
             <a:endParaRPr lang="en-US"/>
           </a:p>
@@ -3852,7 +3984,7 @@
           <a:p>
             <a:fld id="{8DFDE724-0293-4953-AE9D-4D814FA589B0}" type="slidenum">
               <a:rPr lang="en-US" dirty="0"/>
-              <a:t>‹N›</a:t>
+              <a:t>‹#›</a:t>
             </a:fld>
             <a:endParaRPr lang="en-US"/>
           </a:p>
@@ -4037,7 +4169,7 @@
           <a:p>
             <a:fld id="{1AEE0E63-1C4E-4B1B-9ADE-BE64996A5942}" type="datetime1">
               <a:rPr lang="it-IT" smtClean="0"/>
-              <a:t>24/03/2026</a:t>
+              <a:t>26/03/2026</a:t>
             </a:fld>
             <a:endParaRPr lang="en-US"/>
           </a:p>
@@ -4127,7 +4259,7 @@
           <a:p>
             <a:fld id="{8DFDE724-0293-4953-AE9D-4D814FA589B0}" type="slidenum">
               <a:rPr lang="en-US" dirty="0"/>
-              <a:t>‹N›</a:t>
+              <a:t>‹#›</a:t>
             </a:fld>
             <a:endParaRPr lang="en-US"/>
           </a:p>
@@ -5739,10 +5871,14 @@
           <a:p>
             <a:pPr algn="ctr"/>
             <a:r>
-              <a:rPr lang="en-US" b="1"/>
+              <a:rPr lang="en-US" sz="2800" b="1">
+                <a:latin typeface="+mn-lt"/>
+              </a:rPr>
               <a:t>CRESCITA PERCENTUALE PHEV VS BEV</a:t>
             </a:r>
-            <a:endParaRPr lang="it-IT"/>
+            <a:endParaRPr lang="it-IT" sz="2800" b="1">
+              <a:latin typeface="+mn-lt"/>
+            </a:endParaRPr>
           </a:p>
         </p:txBody>
       </p:sp>
@@ -5836,18 +5972,26 @@
           <a:p>
             <a:pPr algn="ctr"/>
             <a:r>
-              <a:rPr lang="en-US" b="1"/>
+              <a:rPr lang="en-US" sz="2800" b="1" dirty="0">
+                <a:latin typeface="+mn-lt"/>
+              </a:rPr>
               <a:t>TREND </a:t>
             </a:r>
             <a:r>
-              <a:rPr lang="en-US" b="1" err="1"/>
+              <a:rPr lang="en-US" sz="2800" b="1" dirty="0" err="1">
+                <a:latin typeface="+mn-lt"/>
+              </a:rPr>
               <a:t>dI</a:t>
             </a:r>
             <a:r>
-              <a:rPr lang="en-US" b="1"/>
+              <a:rPr lang="en-US" sz="2800" b="1" dirty="0">
+                <a:latin typeface="+mn-lt"/>
+              </a:rPr>
               <a:t> CRESCITA AUTO CIRCOLANTI PHEV VS BEV</a:t>
             </a:r>
-            <a:endParaRPr lang="it-IT" b="1"/>
+            <a:endParaRPr lang="it-IT" sz="2800" b="1" dirty="0">
+              <a:latin typeface="+mn-lt"/>
+            </a:endParaRPr>
           </a:p>
         </p:txBody>
       </p:sp>
@@ -5940,26 +6084,38 @@
           <a:p>
             <a:pPr algn="ctr"/>
             <a:r>
-              <a:rPr lang="en-US" sz="2900" b="1" err="1"/>
+              <a:rPr lang="en-US" sz="2800" b="1" err="1">
+                <a:latin typeface="+mn-lt"/>
+              </a:rPr>
               <a:t>Leggi</a:t>
             </a:r>
             <a:r>
-              <a:rPr lang="en-US" sz="2900" b="1"/>
+              <a:rPr lang="en-US" sz="2800" b="1">
+                <a:latin typeface="+mn-lt"/>
+              </a:rPr>
               <a:t> e </a:t>
             </a:r>
             <a:r>
-              <a:rPr lang="en-US" sz="2900" b="1" err="1"/>
+              <a:rPr lang="en-US" sz="2800" b="1" err="1">
+                <a:latin typeface="+mn-lt"/>
+              </a:rPr>
               <a:t>incentivi</a:t>
             </a:r>
             <a:r>
-              <a:rPr lang="en-US" sz="2900" b="1"/>
+              <a:rPr lang="en-US" sz="2800" b="1">
+                <a:latin typeface="+mn-lt"/>
+              </a:rPr>
               <a:t> in </a:t>
             </a:r>
             <a:r>
-              <a:rPr lang="en-US" sz="2900" b="1" err="1"/>
+              <a:rPr lang="en-US" sz="2800" b="1" err="1">
+                <a:latin typeface="+mn-lt"/>
+              </a:rPr>
               <a:t>italia</a:t>
             </a:r>
-            <a:endParaRPr lang="en-US" sz="2900" b="1"/>
+            <a:endParaRPr lang="en-US" sz="2800" b="1">
+              <a:latin typeface="+mn-lt"/>
+            </a:endParaRPr>
           </a:p>
         </p:txBody>
       </p:sp>
@@ -6503,17 +6659,26 @@
             <p:ph type="title"/>
           </p:nvPr>
         </p:nvSpPr>
-        <p:spPr/>
+        <p:spPr>
+          <a:xfrm>
+            <a:off x="808661" y="546100"/>
+            <a:ext cx="10357666" cy="647875"/>
+          </a:xfrm>
+        </p:spPr>
         <p:txBody>
           <a:bodyPr/>
           <a:lstStyle/>
           <a:p>
             <a:r>
-              <a:rPr lang="en-US" err="1"/>
+              <a:rPr lang="en-US" sz="2800" b="1" dirty="0" err="1">
+                <a:latin typeface="+mn-lt"/>
+              </a:rPr>
               <a:t>Confronto</a:t>
             </a:r>
             <a:r>
-              <a:rPr lang="en-US"/>
+              <a:rPr lang="en-US" sz="2800" b="1" dirty="0">
+                <a:latin typeface="+mn-lt"/>
+              </a:rPr>
               <a:t> Nord Centro Sud</a:t>
             </a:r>
           </a:p>
@@ -6521,10 +6686,10 @@
       </p:sp>
       <p:pic>
         <p:nvPicPr>
-          <p:cNvPr id="4" name="Segnaposto contenuto 3" descr="Immagine che contiene testo, schermata, Diagramma, diagramma&#10;&#10;Il contenuto generato dall&amp;#39;IA potrebbe non essere corretto.">
-            <a:extLst>
-              <a:ext uri="{FF2B5EF4-FFF2-40B4-BE49-F238E27FC236}">
-                <a16:creationId xmlns:a16="http://schemas.microsoft.com/office/drawing/2014/main" id="{FECD61F1-816D-0B15-E6BE-682897152FA7}"/>
+          <p:cNvPr id="7" name="Content Placeholder 6">
+            <a:extLst>
+              <a:ext uri="{FF2B5EF4-FFF2-40B4-BE49-F238E27FC236}">
+                <a16:creationId xmlns:a16="http://schemas.microsoft.com/office/drawing/2014/main" id="{FCB509A1-EB75-8CF6-9A3A-0A925C0A7760}"/>
               </a:ext>
             </a:extLst>
           </p:cNvPr>
@@ -6543,52 +6708,14 @@
         </p:blipFill>
         <p:spPr>
           <a:xfrm>
-            <a:off x="3199075" y="2277193"/>
-            <a:ext cx="8435108" cy="4191296"/>
+            <a:off x="1055283" y="1552574"/>
+            <a:ext cx="9940623" cy="4933951"/>
           </a:xfrm>
           <a:prstGeom prst="rect">
             <a:avLst/>
           </a:prstGeom>
         </p:spPr>
       </p:pic>
-      <p:sp>
-        <p:nvSpPr>
-          <p:cNvPr id="5" name="CasellaDiTesto 4">
-            <a:extLst>
-              <a:ext uri="{FF2B5EF4-FFF2-40B4-BE49-F238E27FC236}">
-                <a16:creationId xmlns:a16="http://schemas.microsoft.com/office/drawing/2014/main" id="{A24E2F76-1DAA-BF42-09FE-BA901186EF17}"/>
-              </a:ext>
-            </a:extLst>
-          </p:cNvPr>
-          <p:cNvSpPr txBox="1"/>
-          <p:nvPr/>
-        </p:nvSpPr>
-        <p:spPr>
-          <a:xfrm>
-            <a:off x="649344" y="2982226"/>
-            <a:ext cx="2647757" cy="1477328"/>
-          </a:xfrm>
-          <a:prstGeom prst="rect">
-            <a:avLst/>
-          </a:prstGeom>
-          <a:noFill/>
-        </p:spPr>
-        <p:txBody>
-          <a:bodyPr rot="0" spcFirstLastPara="0" vertOverflow="overflow" horzOverflow="overflow" vert="horz" wrap="square" lIns="91440" tIns="45720" rIns="91440" bIns="45720" numCol="1" spcCol="0" rtlCol="0" fromWordArt="0" anchor="t" anchorCtr="0" forceAA="0" compatLnSpc="1">
-            <a:prstTxWarp prst="textNoShape">
-              <a:avLst/>
-            </a:prstTxWarp>
-            <a:spAutoFit/>
-          </a:bodyPr>
-          <a:lstStyle/>
-          <a:p>
-            <a:r>
-              <a:rPr lang="it-IT"/>
-              <a:t>Come si può notare la differenza di numero di auto elettriche tra Nord, Centro e Sud sono molto rilevanti.</a:t>
-            </a:r>
-          </a:p>
-        </p:txBody>
-      </p:sp>
     </p:spTree>
     <p:extLst>
       <p:ext uri="{BB962C8B-B14F-4D97-AF65-F5344CB8AC3E}">
@@ -7331,34 +7458,56 @@
           <a:p>
             <a:pPr algn="ctr"/>
             <a:r>
-              <a:rPr lang="en-US" b="1" err="1"/>
+              <a:rPr lang="en-US" sz="2800" b="1" err="1">
+                <a:latin typeface="+mn-lt"/>
+              </a:rPr>
               <a:t>Evoluzione</a:t>
             </a:r>
             <a:r>
-              <a:rPr lang="en-US" b="1"/>
+              <a:rPr lang="en-US" sz="2800" b="1" dirty="0">
+                <a:latin typeface="+mn-lt"/>
+              </a:rPr>
               <a:t> </a:t>
             </a:r>
             <a:r>
-              <a:rPr lang="en-US" b="1" err="1"/>
+              <a:rPr lang="en-US" sz="2800" b="1" err="1">
+                <a:latin typeface="+mn-lt"/>
+              </a:rPr>
               <a:t>colonnine</a:t>
             </a:r>
             <a:r>
-              <a:rPr lang="en-US" b="1"/>
+              <a:rPr lang="en-US" sz="2800" b="1">
+                <a:latin typeface="+mn-lt"/>
+              </a:rPr>
               <a:t> di </a:t>
             </a:r>
             <a:r>
-              <a:rPr lang="en-US" b="1" err="1"/>
+              <a:rPr lang="en-US" sz="2800" b="1" err="1">
+                <a:latin typeface="+mn-lt"/>
+              </a:rPr>
               <a:t>ricarica</a:t>
             </a:r>
             <a:r>
-              <a:rPr lang="en-US" b="1"/>
-              <a:t> in </a:t>
-            </a:r>
-            <a:r>
-              <a:rPr lang="en-US" b="1" err="1"/>
+              <a:rPr lang="en-US" sz="2800" b="1" dirty="0">
+                <a:latin typeface="+mn-lt"/>
+              </a:rPr>
+              <a:t> </a:t>
+            </a:r>
+            <a:r>
+              <a:rPr lang="en-US" sz="2800" b="1">
+                <a:latin typeface="+mn-lt"/>
+              </a:rPr>
+              <a:t>in </a:t>
+            </a:r>
+            <a:r>
+              <a:rPr lang="en-US" sz="2800" b="1" err="1">
+                <a:latin typeface="+mn-lt"/>
+              </a:rPr>
               <a:t>italia</a:t>
             </a:r>
-            <a:endParaRPr lang="en-US" b="1"/>
+            <a:endParaRPr lang="en-US" sz="2800" b="1">
+              <a:latin typeface="+mn-lt"/>
+            </a:endParaRPr>
           </a:p>
         </p:txBody>
       </p:sp>
@@ -8102,7 +8251,7 @@
           <a:p>
             <a:pPr algn="ctr"/>
             <a:r>
-              <a:rPr lang="en-US" sz="3200" b="1" kern="1200" err="1">
+              <a:rPr lang="en-US" sz="3200" b="1" kern="1200" dirty="0" err="1">
                 <a:latin typeface="+mj-lt"/>
                 <a:ea typeface="+mj-ea"/>
                 <a:cs typeface="+mj-cs"/>
@@ -8110,7 +8259,7 @@
               <a:t>Nuove</a:t>
             </a:r>
             <a:r>
-              <a:rPr lang="en-US" sz="3200" b="1" kern="1200">
+              <a:rPr lang="en-US" sz="3200" b="1" kern="1200" dirty="0">
                 <a:latin typeface="+mj-lt"/>
                 <a:ea typeface="+mj-ea"/>
                 <a:cs typeface="+mj-cs"/>
@@ -8118,7 +8267,7 @@
               <a:t> </a:t>
             </a:r>
             <a:r>
-              <a:rPr lang="en-US" sz="3200" b="1" kern="1200" err="1">
+              <a:rPr lang="en-US" sz="3200" b="1" kern="1200" dirty="0" err="1">
                 <a:latin typeface="+mj-lt"/>
                 <a:ea typeface="+mj-ea"/>
                 <a:cs typeface="+mj-cs"/>
@@ -8126,7 +8275,7 @@
               <a:t>Immatricolazioni</a:t>
             </a:r>
             <a:r>
-              <a:rPr lang="en-US" sz="3200" b="1" kern="1200">
+              <a:rPr lang="en-US" sz="3200" b="1" kern="1200" dirty="0">
                 <a:latin typeface="+mj-lt"/>
                 <a:ea typeface="+mj-ea"/>
                 <a:cs typeface="+mj-cs"/>
@@ -8134,7 +8283,7 @@
               <a:t> per </a:t>
             </a:r>
             <a:r>
-              <a:rPr lang="en-US" sz="3200" b="1" kern="1200" err="1">
+              <a:rPr lang="en-US" sz="3200" b="1" kern="1200" dirty="0" err="1">
                 <a:latin typeface="+mj-lt"/>
                 <a:ea typeface="+mj-ea"/>
                 <a:cs typeface="+mj-cs"/>
@@ -8142,7 +8291,7 @@
               <a:t>tipo</a:t>
             </a:r>
             <a:r>
-              <a:rPr lang="en-US" sz="3200" b="1" kern="1200">
+              <a:rPr lang="en-US" sz="3200" b="1" kern="1200" dirty="0">
                 <a:latin typeface="+mj-lt"/>
                 <a:ea typeface="+mj-ea"/>
                 <a:cs typeface="+mj-cs"/>
@@ -8150,14 +8299,14 @@
               <a:t> di </a:t>
             </a:r>
             <a:r>
-              <a:rPr lang="en-US" sz="3200" b="1" kern="1200" err="1">
-                <a:latin typeface="+mj-lt"/>
-                <a:ea typeface="+mj-ea"/>
-                <a:cs typeface="+mj-cs"/>
-              </a:rPr>
+              <a:rPr lang="en-US" b="1" dirty="0" err="1"/>
               <a:t>Motorizzazione</a:t>
             </a:r>
-            <a:endParaRPr lang="it-IT" sz="3200" err="1">
+            <a:r>
+              <a:rPr lang="en-US" b="1" dirty="0"/>
+              <a:t> (2025)</a:t>
+            </a:r>
+            <a:endParaRPr lang="it-IT" sz="3200" dirty="0" err="1">
               <a:ea typeface="+mj-ea"/>
               <a:cs typeface="+mj-cs"/>
             </a:endParaRPr>
@@ -8683,7 +8832,7 @@
       </p:sp>
       <p:pic>
         <p:nvPicPr>
-          <p:cNvPr id="8" name="Content Placeholder 7" descr="A graph of different colored bars&#10;&#10;AI-generated content may be incorrect.">
+          <p:cNvPr id="8" name="Content Placeholder 7" descr="Immagine che contiene testo, schermata, diagramma, Policromia&#10;&#10;Il contenuto generato dall&amp;#39;IA potrebbe non essere corretto.">
             <a:extLst>
               <a:ext uri="{FF2B5EF4-FFF2-40B4-BE49-F238E27FC236}">
                 <a16:creationId xmlns:a16="http://schemas.microsoft.com/office/drawing/2014/main" id="{8C66AA7B-555E-8951-CCD7-A60DE12F7D0D}"/>
@@ -8705,8 +8854,8 @@
         </p:blipFill>
         <p:spPr>
           <a:xfrm>
-            <a:off x="2388635" y="1502621"/>
-            <a:ext cx="7101603" cy="4952416"/>
+            <a:off x="2390205" y="1502621"/>
+            <a:ext cx="7098462" cy="4952416"/>
           </a:xfrm>
           <a:prstGeom prst="rect">
             <a:avLst/>
